--- a/deck/AI_Cost_by_Application.pptx
+++ b/deck/AI_Cost_by_Application.pptx
@@ -4146,7 +4146,7 @@
         </p:nvSpPr>
         <p:spPr>
           <a:xfrm>
-            <a:off x="457200" y="3337560"/>
+            <a:off x="457200" y="3295026"/>
             <a:ext cx="2834640" cy="292608"/>
           </a:xfrm>
           <a:prstGeom prst="rect">
@@ -4185,7 +4185,7 @@
         </p:nvSpPr>
         <p:spPr>
           <a:xfrm>
-            <a:off x="3474720" y="3410712"/>
+            <a:off x="3474720" y="3368178"/>
             <a:ext cx="7071055" cy="146304"/>
           </a:xfrm>
           <a:prstGeom prst="roundRect">
@@ -4212,7 +4212,7 @@
         </p:nvSpPr>
         <p:spPr>
           <a:xfrm>
-            <a:off x="3474720" y="3410712"/>
+            <a:off x="3474720" y="3368178"/>
             <a:ext cx="6615617" cy="146304"/>
           </a:xfrm>
           <a:prstGeom prst="roundRect">
@@ -4239,7 +4239,7 @@
         </p:nvSpPr>
         <p:spPr>
           <a:xfrm>
-            <a:off x="10682935" y="3337560"/>
+            <a:off x="10682935" y="3295026"/>
             <a:ext cx="1051560" cy="292608"/>
           </a:xfrm>
           <a:prstGeom prst="rect">
@@ -4278,7 +4278,7 @@
         </p:nvSpPr>
         <p:spPr>
           <a:xfrm>
-            <a:off x="457200" y="3721608"/>
+            <a:off x="457200" y="3636539"/>
             <a:ext cx="2834640" cy="292608"/>
           </a:xfrm>
           <a:prstGeom prst="rect">
@@ -4317,7 +4317,7 @@
         </p:nvSpPr>
         <p:spPr>
           <a:xfrm>
-            <a:off x="3474720" y="3794760"/>
+            <a:off x="3474720" y="3709691"/>
             <a:ext cx="7071055" cy="146304"/>
           </a:xfrm>
           <a:prstGeom prst="roundRect">
@@ -4344,7 +4344,7 @@
         </p:nvSpPr>
         <p:spPr>
           <a:xfrm>
-            <a:off x="3474720" y="3794760"/>
+            <a:off x="3474720" y="3709691"/>
             <a:ext cx="3290590" cy="146304"/>
           </a:xfrm>
           <a:prstGeom prst="roundRect">
@@ -4371,7 +4371,7 @@
         </p:nvSpPr>
         <p:spPr>
           <a:xfrm>
-            <a:off x="10682935" y="3721608"/>
+            <a:off x="10682935" y="3636539"/>
             <a:ext cx="1051560" cy="292608"/>
           </a:xfrm>
           <a:prstGeom prst="rect">
@@ -4410,7 +4410,7 @@
         </p:nvSpPr>
         <p:spPr>
           <a:xfrm>
-            <a:off x="457200" y="4105656"/>
+            <a:off x="457200" y="3978053"/>
             <a:ext cx="2834640" cy="292608"/>
           </a:xfrm>
           <a:prstGeom prst="rect">
@@ -4449,7 +4449,7 @@
         </p:nvSpPr>
         <p:spPr>
           <a:xfrm>
-            <a:off x="3474720" y="4178808"/>
+            <a:off x="3474720" y="4051205"/>
             <a:ext cx="7071055" cy="146304"/>
           </a:xfrm>
           <a:prstGeom prst="roundRect">
@@ -4476,7 +4476,7 @@
         </p:nvSpPr>
         <p:spPr>
           <a:xfrm>
-            <a:off x="3474720" y="4178808"/>
+            <a:off x="3474720" y="4051205"/>
             <a:ext cx="2578081" cy="146304"/>
           </a:xfrm>
           <a:prstGeom prst="roundRect">
@@ -4503,7 +4503,7 @@
         </p:nvSpPr>
         <p:spPr>
           <a:xfrm>
-            <a:off x="10682935" y="4105656"/>
+            <a:off x="10682935" y="3978053"/>
             <a:ext cx="1051560" cy="292608"/>
           </a:xfrm>
           <a:prstGeom prst="rect">
@@ -4542,7 +4542,7 @@
         </p:nvSpPr>
         <p:spPr>
           <a:xfrm>
-            <a:off x="457200" y="4489704"/>
+            <a:off x="457200" y="4319566"/>
             <a:ext cx="2834640" cy="292608"/>
           </a:xfrm>
           <a:prstGeom prst="rect">
@@ -4581,7 +4581,7 @@
         </p:nvSpPr>
         <p:spPr>
           <a:xfrm>
-            <a:off x="3474720" y="4562856"/>
+            <a:off x="3474720" y="4392718"/>
             <a:ext cx="7071055" cy="146304"/>
           </a:xfrm>
           <a:prstGeom prst="roundRect">
@@ -4608,7 +4608,7 @@
         </p:nvSpPr>
         <p:spPr>
           <a:xfrm>
-            <a:off x="3474720" y="4562856"/>
+            <a:off x="3474720" y="4392718"/>
             <a:ext cx="1676457" cy="146304"/>
           </a:xfrm>
           <a:prstGeom prst="roundRect">
@@ -4635,7 +4635,7 @@
         </p:nvSpPr>
         <p:spPr>
           <a:xfrm>
-            <a:off x="10682935" y="4489704"/>
+            <a:off x="10682935" y="4319566"/>
             <a:ext cx="1051560" cy="292608"/>
           </a:xfrm>
           <a:prstGeom prst="rect">
@@ -4674,7 +4674,7 @@
         </p:nvSpPr>
         <p:spPr>
           <a:xfrm>
-            <a:off x="457200" y="4873752"/>
+            <a:off x="457200" y="4661080"/>
             <a:ext cx="2834640" cy="292608"/>
           </a:xfrm>
           <a:prstGeom prst="rect">
@@ -4713,7 +4713,7 @@
         </p:nvSpPr>
         <p:spPr>
           <a:xfrm>
-            <a:off x="3474720" y="4946904"/>
+            <a:off x="3474720" y="4734232"/>
             <a:ext cx="7071055" cy="146304"/>
           </a:xfrm>
           <a:prstGeom prst="roundRect">
@@ -4740,7 +4740,7 @@
         </p:nvSpPr>
         <p:spPr>
           <a:xfrm>
-            <a:off x="3474720" y="4946904"/>
+            <a:off x="3474720" y="4734232"/>
             <a:ext cx="1462965" cy="146304"/>
           </a:xfrm>
           <a:prstGeom prst="roundRect">
@@ -4767,7 +4767,7 @@
         </p:nvSpPr>
         <p:spPr>
           <a:xfrm>
-            <a:off x="10682935" y="4873752"/>
+            <a:off x="10682935" y="4661080"/>
             <a:ext cx="1051560" cy="292608"/>
           </a:xfrm>
           <a:prstGeom prst="rect">
@@ -4806,12 +4806,12 @@
         </p:nvSpPr>
         <p:spPr>
           <a:xfrm>
-            <a:off x="457200" y="5440680"/>
-            <a:ext cx="11277295" cy="777240"/>
+            <a:off x="457200" y="5185474"/>
+            <a:ext cx="11277295" cy="1041591"/>
           </a:xfrm>
           <a:prstGeom prst="roundRect">
             <a:avLst>
-              <a:gd name="adj" fmla="val 7059"/>
+              <a:gd name="adj" fmla="val 5267"/>
             </a:avLst>
           </a:prstGeom>
           <a:solidFill>
@@ -4833,7 +4833,7 @@
         </p:nvSpPr>
         <p:spPr>
           <a:xfrm>
-            <a:off x="685800" y="5550408"/>
+            <a:off x="685800" y="5295202"/>
             <a:ext cx="10820095" cy="292608"/>
           </a:xfrm>
           <a:prstGeom prst="rect">
@@ -4872,20 +4872,23 @@
         </p:nvSpPr>
         <p:spPr>
           <a:xfrm>
-            <a:off x="685800" y="5824728"/>
-            <a:ext cx="10820095" cy="329184"/>
-          </a:xfrm>
-          <a:prstGeom prst="rect">
-            <a:avLst/>
-          </a:prstGeom>
-          <a:noFill/>
-          <a:ln/>
-        </p:spPr>
-        <p:txBody>
-          <a:bodyPr wrap="square" lIns="0" tIns="0" rIns="0" bIns="0" rtlCol="0" anchor="ctr"/>
-          <a:lstStyle/>
-          <a:p>
-            <a:pPr indent="0" marL="0">
+            <a:off x="685800" y="5624386"/>
+            <a:ext cx="10820095" cy="474663"/>
+          </a:xfrm>
+          <a:prstGeom prst="rect">
+            <a:avLst/>
+          </a:prstGeom>
+          <a:noFill/>
+          <a:ln/>
+        </p:spPr>
+        <p:txBody>
+          <a:bodyPr wrap="square" lIns="0" tIns="0" rIns="0" bIns="0" rtlCol="0" anchor="t"/>
+          <a:lstStyle/>
+          <a:p>
+            <a:pPr indent="0" marL="0">
+              <a:lnSpc>
+                <a:spcPct val="115000"/>
+              </a:lnSpc>
               <a:buNone/>
             </a:pPr>
             <a:r>
@@ -5316,7 +5319,7 @@
         <p:spPr>
           <a:xfrm>
             <a:off x="8293608" y="1929384"/>
-            <a:ext cx="3239719" cy="329184"/>
+            <a:ext cx="3239719" cy="356616"/>
           </a:xfrm>
           <a:prstGeom prst="rect">
             <a:avLst/>
@@ -5463,7 +5466,7 @@
         <p:spPr>
           <a:xfrm>
             <a:off x="8293608" y="3154680"/>
-            <a:ext cx="3239719" cy="329184"/>
+            <a:ext cx="3239719" cy="356616"/>
           </a:xfrm>
           <a:prstGeom prst="rect">
             <a:avLst/>
@@ -5610,7 +5613,7 @@
         <p:spPr>
           <a:xfrm>
             <a:off x="8293608" y="4379976"/>
-            <a:ext cx="3239719" cy="329184"/>
+            <a:ext cx="3239719" cy="356616"/>
           </a:xfrm>
           <a:prstGeom prst="rect">
             <a:avLst/>
@@ -6056,7 +6059,7 @@
         <p:spPr>
           <a:xfrm>
             <a:off x="8293608" y="1929384"/>
-            <a:ext cx="3239719" cy="329184"/>
+            <a:ext cx="3239719" cy="356616"/>
           </a:xfrm>
           <a:prstGeom prst="rect">
             <a:avLst/>
@@ -6203,7 +6206,7 @@
         <p:spPr>
           <a:xfrm>
             <a:off x="8293608" y="3154680"/>
-            <a:ext cx="3239719" cy="329184"/>
+            <a:ext cx="3239719" cy="356616"/>
           </a:xfrm>
           <a:prstGeom prst="rect">
             <a:avLst/>
@@ -6350,7 +6353,7 @@
         <p:spPr>
           <a:xfrm>
             <a:off x="8293608" y="4379976"/>
-            <a:ext cx="3239719" cy="329184"/>
+            <a:ext cx="3239719" cy="356616"/>
           </a:xfrm>
           <a:prstGeom prst="rect">
             <a:avLst/>
@@ -6636,11 +6639,11 @@
         <p:spPr>
           <a:xfrm>
             <a:off x="457200" y="1234440"/>
-            <a:ext cx="3606698" cy="960120"/>
+            <a:ext cx="3606698" cy="1078992"/>
           </a:xfrm>
           <a:prstGeom prst="roundRect">
             <a:avLst>
-              <a:gd name="adj" fmla="val 5714"/>
+              <a:gd name="adj" fmla="val 5085"/>
             </a:avLst>
           </a:prstGeom>
           <a:solidFill>
@@ -6741,7 +6744,7 @@
         <p:spPr>
           <a:xfrm>
             <a:off x="658368" y="1929384"/>
-            <a:ext cx="3204362" cy="329184"/>
+            <a:ext cx="3204362" cy="338328"/>
           </a:xfrm>
           <a:prstGeom prst="rect">
             <a:avLst/>
@@ -6783,11 +6786,11 @@
         <p:spPr>
           <a:xfrm>
             <a:off x="4292498" y="1234440"/>
-            <a:ext cx="3606698" cy="960120"/>
+            <a:ext cx="3606698" cy="1078992"/>
           </a:xfrm>
           <a:prstGeom prst="roundRect">
             <a:avLst>
-              <a:gd name="adj" fmla="val 5714"/>
+              <a:gd name="adj" fmla="val 5085"/>
             </a:avLst>
           </a:prstGeom>
           <a:solidFill>
@@ -6888,7 +6891,7 @@
         <p:spPr>
           <a:xfrm>
             <a:off x="4493666" y="1929384"/>
-            <a:ext cx="3204362" cy="329184"/>
+            <a:ext cx="3204362" cy="338328"/>
           </a:xfrm>
           <a:prstGeom prst="rect">
             <a:avLst/>
@@ -6930,11 +6933,11 @@
         <p:spPr>
           <a:xfrm>
             <a:off x="8127797" y="1234440"/>
-            <a:ext cx="3606698" cy="960120"/>
+            <a:ext cx="3606698" cy="1078992"/>
           </a:xfrm>
           <a:prstGeom prst="roundRect">
             <a:avLst>
-              <a:gd name="adj" fmla="val 5714"/>
+              <a:gd name="adj" fmla="val 5085"/>
             </a:avLst>
           </a:prstGeom>
           <a:solidFill>
@@ -7035,7 +7038,7 @@
         <p:spPr>
           <a:xfrm>
             <a:off x="8328965" y="1929384"/>
-            <a:ext cx="3204362" cy="329184"/>
+            <a:ext cx="3204362" cy="338328"/>
           </a:xfrm>
           <a:prstGeom prst="rect">
             <a:avLst/>
@@ -7076,7 +7079,7 @@
         </p:nvSpPr>
         <p:spPr>
           <a:xfrm>
-            <a:off x="457200" y="2404872"/>
+            <a:off x="457200" y="2514600"/>
             <a:ext cx="11277295" cy="237744"/>
           </a:xfrm>
           <a:prstGeom prst="rect">
@@ -7115,7 +7118,7 @@
         </p:nvSpPr>
         <p:spPr>
           <a:xfrm>
-            <a:off x="10578694" y="2404872"/>
+            <a:off x="10578694" y="2514600"/>
             <a:ext cx="1155802" cy="237744"/>
           </a:xfrm>
           <a:prstGeom prst="rect">
@@ -7154,7 +7157,7 @@
         </p:nvSpPr>
         <p:spPr>
           <a:xfrm>
-            <a:off x="10377526" y="2459736"/>
+            <a:off x="10377526" y="2569464"/>
             <a:ext cx="128016" cy="128016"/>
           </a:xfrm>
           <a:prstGeom prst="rect">
@@ -7179,7 +7182,7 @@
         </p:nvSpPr>
         <p:spPr>
           <a:xfrm>
-            <a:off x="9298534" y="2404872"/>
+            <a:off x="9298534" y="2514600"/>
             <a:ext cx="914400" cy="237744"/>
           </a:xfrm>
           <a:prstGeom prst="rect">
@@ -7218,7 +7221,7 @@
         </p:nvSpPr>
         <p:spPr>
           <a:xfrm>
-            <a:off x="9097366" y="2459736"/>
+            <a:off x="9097366" y="2569464"/>
             <a:ext cx="128016" cy="128016"/>
           </a:xfrm>
           <a:prstGeom prst="rect">
@@ -7243,8 +7246,8 @@
         </p:nvSpPr>
         <p:spPr>
           <a:xfrm>
-            <a:off x="457200" y="2770632"/>
-            <a:ext cx="8899855" cy="192240"/>
+            <a:off x="457200" y="2880360"/>
+            <a:ext cx="8899855" cy="190500"/>
           </a:xfrm>
           <a:prstGeom prst="rect">
             <a:avLst/>
@@ -7282,8 +7285,8 @@
         </p:nvSpPr>
         <p:spPr>
           <a:xfrm>
-            <a:off x="9539935" y="2770632"/>
-            <a:ext cx="2194560" cy="192240"/>
+            <a:off x="9539935" y="2880360"/>
+            <a:ext cx="2194560" cy="190500"/>
           </a:xfrm>
           <a:prstGeom prst="rect">
             <a:avLst/>
@@ -7321,8 +7324,8 @@
         </p:nvSpPr>
         <p:spPr>
           <a:xfrm>
-            <a:off x="457200" y="3014136"/>
-            <a:ext cx="9905695" cy="347772"/>
+            <a:off x="457200" y="3120396"/>
+            <a:ext cx="9905695" cy="324888"/>
           </a:xfrm>
           <a:prstGeom prst="rect">
             <a:avLst/>
@@ -7346,8 +7349,8 @@
         </p:nvSpPr>
         <p:spPr>
           <a:xfrm>
-            <a:off x="457200" y="3014136"/>
-            <a:ext cx="8127205" cy="347772"/>
+            <a:off x="457200" y="3120396"/>
+            <a:ext cx="8127205" cy="324888"/>
           </a:xfrm>
           <a:prstGeom prst="rect">
             <a:avLst/>
@@ -7371,8 +7374,8 @@
         </p:nvSpPr>
         <p:spPr>
           <a:xfrm>
-            <a:off x="8584405" y="3014136"/>
-            <a:ext cx="1778490" cy="347772"/>
+            <a:off x="8584405" y="3120396"/>
+            <a:ext cx="1778490" cy="324888"/>
           </a:xfrm>
           <a:prstGeom prst="rect">
             <a:avLst/>
@@ -7396,8 +7399,8 @@
         </p:nvSpPr>
         <p:spPr>
           <a:xfrm>
-            <a:off x="10500055" y="3014136"/>
-            <a:ext cx="1234440" cy="347772"/>
+            <a:off x="10500055" y="3120396"/>
+            <a:ext cx="1234440" cy="324888"/>
           </a:xfrm>
           <a:prstGeom prst="rect">
             <a:avLst/>
@@ -7435,7 +7438,7 @@
         </p:nvSpPr>
         <p:spPr>
           <a:xfrm>
-            <a:off x="457200" y="3393948"/>
+            <a:off x="457200" y="3476244"/>
             <a:ext cx="9905695" cy="190500"/>
           </a:xfrm>
           <a:prstGeom prst="rect">
@@ -7474,8 +7477,8 @@
         </p:nvSpPr>
         <p:spPr>
           <a:xfrm>
-            <a:off x="457200" y="3639312"/>
-            <a:ext cx="8899855" cy="192240"/>
+            <a:off x="457200" y="3721608"/>
+            <a:ext cx="8899855" cy="190500"/>
           </a:xfrm>
           <a:prstGeom prst="rect">
             <a:avLst/>
@@ -7513,8 +7516,8 @@
         </p:nvSpPr>
         <p:spPr>
           <a:xfrm>
-            <a:off x="9539935" y="3639312"/>
-            <a:ext cx="2194560" cy="192240"/>
+            <a:off x="9539935" y="3721608"/>
+            <a:ext cx="2194560" cy="190500"/>
           </a:xfrm>
           <a:prstGeom prst="rect">
             <a:avLst/>
@@ -7552,8 +7555,8 @@
         </p:nvSpPr>
         <p:spPr>
           <a:xfrm>
-            <a:off x="457200" y="3882816"/>
-            <a:ext cx="9905695" cy="347772"/>
+            <a:off x="457200" y="3961644"/>
+            <a:ext cx="9905695" cy="324888"/>
           </a:xfrm>
           <a:prstGeom prst="rect">
             <a:avLst/>
@@ -7577,8 +7580,8 @@
         </p:nvSpPr>
         <p:spPr>
           <a:xfrm>
-            <a:off x="457200" y="3882816"/>
-            <a:ext cx="4096741" cy="347772"/>
+            <a:off x="457200" y="3961644"/>
+            <a:ext cx="4096741" cy="324888"/>
           </a:xfrm>
           <a:prstGeom prst="rect">
             <a:avLst/>
@@ -7602,8 +7605,8 @@
         </p:nvSpPr>
         <p:spPr>
           <a:xfrm>
-            <a:off x="4553941" y="3882816"/>
-            <a:ext cx="3067816" cy="347772"/>
+            <a:off x="4553941" y="3961644"/>
+            <a:ext cx="3067816" cy="324888"/>
           </a:xfrm>
           <a:prstGeom prst="rect">
             <a:avLst/>
@@ -7627,8 +7630,8 @@
         </p:nvSpPr>
         <p:spPr>
           <a:xfrm>
-            <a:off x="10500055" y="3882816"/>
-            <a:ext cx="1234440" cy="347772"/>
+            <a:off x="10500055" y="3961644"/>
+            <a:ext cx="1234440" cy="324888"/>
           </a:xfrm>
           <a:prstGeom prst="rect">
             <a:avLst/>
@@ -7666,7 +7669,7 @@
         </p:nvSpPr>
         <p:spPr>
           <a:xfrm>
-            <a:off x="457200" y="4262628"/>
+            <a:off x="457200" y="4317492"/>
             <a:ext cx="9905695" cy="190500"/>
           </a:xfrm>
           <a:prstGeom prst="rect">
@@ -7705,8 +7708,8 @@
         </p:nvSpPr>
         <p:spPr>
           <a:xfrm>
-            <a:off x="457200" y="4507992"/>
-            <a:ext cx="8899855" cy="192240"/>
+            <a:off x="457200" y="4562856"/>
+            <a:ext cx="8899855" cy="190500"/>
           </a:xfrm>
           <a:prstGeom prst="rect">
             <a:avLst/>
@@ -7744,8 +7747,8 @@
         </p:nvSpPr>
         <p:spPr>
           <a:xfrm>
-            <a:off x="9539935" y="4507992"/>
-            <a:ext cx="2194560" cy="192240"/>
+            <a:off x="9539935" y="4562856"/>
+            <a:ext cx="2194560" cy="190500"/>
           </a:xfrm>
           <a:prstGeom prst="rect">
             <a:avLst/>
@@ -7783,8 +7786,8 @@
         </p:nvSpPr>
         <p:spPr>
           <a:xfrm>
-            <a:off x="457200" y="4751496"/>
-            <a:ext cx="9905695" cy="347772"/>
+            <a:off x="457200" y="4802892"/>
+            <a:ext cx="9905695" cy="324888"/>
           </a:xfrm>
           <a:prstGeom prst="rect">
             <a:avLst/>
@@ -7808,8 +7811,8 @@
         </p:nvSpPr>
         <p:spPr>
           <a:xfrm>
-            <a:off x="457200" y="4751496"/>
-            <a:ext cx="6526926" cy="347772"/>
+            <a:off x="457200" y="4802892"/>
+            <a:ext cx="6526926" cy="324888"/>
           </a:xfrm>
           <a:prstGeom prst="rect">
             <a:avLst/>
@@ -7833,8 +7836,8 @@
         </p:nvSpPr>
         <p:spPr>
           <a:xfrm>
-            <a:off x="10500055" y="4751496"/>
-            <a:ext cx="1234440" cy="347772"/>
+            <a:off x="10500055" y="4802892"/>
+            <a:ext cx="1234440" cy="324888"/>
           </a:xfrm>
           <a:prstGeom prst="rect">
             <a:avLst/>
@@ -7872,7 +7875,7 @@
         </p:nvSpPr>
         <p:spPr>
           <a:xfrm>
-            <a:off x="457200" y="5131308"/>
+            <a:off x="457200" y="5158740"/>
             <a:ext cx="9905695" cy="190500"/>
           </a:xfrm>
           <a:prstGeom prst="rect">
@@ -7911,8 +7914,8 @@
         </p:nvSpPr>
         <p:spPr>
           <a:xfrm>
-            <a:off x="457200" y="5376672"/>
-            <a:ext cx="8899855" cy="192240"/>
+            <a:off x="457200" y="5404104"/>
+            <a:ext cx="8899855" cy="190500"/>
           </a:xfrm>
           <a:prstGeom prst="rect">
             <a:avLst/>
@@ -7950,8 +7953,8 @@
         </p:nvSpPr>
         <p:spPr>
           <a:xfrm>
-            <a:off x="9539935" y="5376672"/>
-            <a:ext cx="2194560" cy="192240"/>
+            <a:off x="9539935" y="5404104"/>
+            <a:ext cx="2194560" cy="190500"/>
           </a:xfrm>
           <a:prstGeom prst="rect">
             <a:avLst/>
@@ -7989,8 +7992,8 @@
         </p:nvSpPr>
         <p:spPr>
           <a:xfrm>
-            <a:off x="457200" y="5620176"/>
-            <a:ext cx="9905695" cy="347772"/>
+            <a:off x="457200" y="5644140"/>
+            <a:ext cx="9905695" cy="324888"/>
           </a:xfrm>
           <a:prstGeom prst="rect">
             <a:avLst/>
@@ -8014,8 +8017,8 @@
         </p:nvSpPr>
         <p:spPr>
           <a:xfrm>
-            <a:off x="457200" y="5620176"/>
-            <a:ext cx="207348" cy="347772"/>
+            <a:off x="457200" y="5644140"/>
+            <a:ext cx="207348" cy="324888"/>
           </a:xfrm>
           <a:prstGeom prst="rect">
             <a:avLst/>
@@ -8039,8 +8042,8 @@
         </p:nvSpPr>
         <p:spPr>
           <a:xfrm>
-            <a:off x="664548" y="5620176"/>
-            <a:ext cx="280859" cy="347772"/>
+            <a:off x="664548" y="5644140"/>
+            <a:ext cx="280859" cy="324888"/>
           </a:xfrm>
           <a:prstGeom prst="rect">
             <a:avLst/>
@@ -8064,8 +8067,8 @@
         </p:nvSpPr>
         <p:spPr>
           <a:xfrm>
-            <a:off x="10500055" y="5620176"/>
-            <a:ext cx="1234440" cy="347772"/>
+            <a:off x="10500055" y="5644140"/>
+            <a:ext cx="1234440" cy="324888"/>
           </a:xfrm>
           <a:prstGeom prst="rect">
             <a:avLst/>
@@ -9972,7 +9975,7 @@
         <p:spPr>
           <a:xfrm>
             <a:off x="658368" y="5172456"/>
-            <a:ext cx="3204362" cy="329184"/>
+            <a:ext cx="3204362" cy="338328"/>
           </a:xfrm>
           <a:prstGeom prst="rect">
             <a:avLst/>
@@ -10119,7 +10122,7 @@
         <p:spPr>
           <a:xfrm>
             <a:off x="4493666" y="5172456"/>
-            <a:ext cx="3204362" cy="329184"/>
+            <a:ext cx="3204362" cy="338328"/>
           </a:xfrm>
           <a:prstGeom prst="rect">
             <a:avLst/>
@@ -10266,7 +10269,7 @@
         <p:spPr>
           <a:xfrm>
             <a:off x="8328965" y="5172456"/>
-            <a:ext cx="3204362" cy="329184"/>
+            <a:ext cx="3204362" cy="338328"/>
           </a:xfrm>
           <a:prstGeom prst="rect">
             <a:avLst/>
@@ -10574,7 +10577,7 @@
         <p:spPr>
           <a:xfrm>
             <a:off x="1115568" y="1463040"/>
-            <a:ext cx="4797400" cy="666750"/>
+            <a:ext cx="4797400" cy="309336"/>
           </a:xfrm>
           <a:prstGeom prst="rect">
             <a:avLst/>
@@ -10590,7 +10593,7 @@
               <a:buNone/>
             </a:pPr>
             <a:r>
-              <a:rPr lang="en-US" sz="2100" b="1" dirty="0">
+              <a:rPr lang="en-US" sz="1949" b="1" dirty="0">
                 <a:solidFill>
                   <a:srgbClr val="F4F7FB"/>
                 </a:solidFill>
@@ -10600,7 +10603,7 @@
               </a:rPr>
               <a:t>Turn on the Azure actuals</a:t>
             </a:r>
-            <a:endParaRPr lang="en-US" sz="2100" dirty="0"/>
+            <a:endParaRPr lang="en-US" sz="1949" dirty="0"/>
           </a:p>
         </p:txBody>
       </p:sp>
@@ -10612,8 +10615,8 @@
         </p:nvSpPr>
         <p:spPr>
           <a:xfrm>
-            <a:off x="1115568" y="2175510"/>
-            <a:ext cx="4797400" cy="508000"/>
+            <a:off x="1115568" y="1818096"/>
+            <a:ext cx="4797400" cy="471369"/>
           </a:xfrm>
           <a:prstGeom prst="rect">
             <a:avLst/>
@@ -10632,7 +10635,7 @@
               <a:buNone/>
             </a:pPr>
             <a:r>
-              <a:rPr lang="en-US" sz="1600" dirty="0">
+              <a:rPr lang="en-US" sz="1485" dirty="0">
                 <a:solidFill>
                   <a:srgbClr val="91A0B7"/>
                 </a:solidFill>
@@ -10642,7 +10645,7 @@
               </a:rPr>
               <a:t>Export the reconciliation figure with the estimate, as the other providers already do.</a:t>
             </a:r>
-            <a:endParaRPr lang="en-US" sz="1600" dirty="0"/>
+            <a:endParaRPr lang="en-US" sz="1485" dirty="0"/>
           </a:p>
         </p:txBody>
       </p:sp>
@@ -10654,8 +10657,8 @@
         </p:nvSpPr>
         <p:spPr>
           <a:xfrm>
-            <a:off x="1115568" y="2729230"/>
-            <a:ext cx="4797400" cy="258826"/>
+            <a:off x="1115568" y="2335185"/>
+            <a:ext cx="4797400" cy="242800"/>
           </a:xfrm>
           <a:prstGeom prst="rect">
             <a:avLst/>
@@ -10674,7 +10677,7 @@
               <a:buNone/>
             </a:pPr>
             <a:r>
-              <a:rPr lang="en-US" sz="1400" i="1" dirty="0">
+              <a:rPr lang="en-US" sz="1299" i="1" dirty="0">
                 <a:solidFill>
                   <a:srgbClr val="3DD9EB"/>
                 </a:solidFill>
@@ -10684,7 +10687,7 @@
               </a:rPr>
               <a:t>Tip: It is a column in the export, not a new system.</a:t>
             </a:r>
-            <a:endParaRPr lang="en-US" sz="1400" dirty="0"/>
+            <a:endParaRPr lang="en-US" sz="1299" dirty="0"/>
           </a:p>
         </p:txBody>
       </p:sp>
@@ -10761,7 +10764,7 @@
         <p:spPr>
           <a:xfrm>
             <a:off x="1115568" y="3102102"/>
-            <a:ext cx="4797400" cy="666750"/>
+            <a:ext cx="4797400" cy="309336"/>
           </a:xfrm>
           <a:prstGeom prst="rect">
             <a:avLst/>
@@ -10777,7 +10780,7 @@
               <a:buNone/>
             </a:pPr>
             <a:r>
-              <a:rPr lang="en-US" sz="2100" b="1" dirty="0">
+              <a:rPr lang="en-US" sz="1949" b="1" dirty="0">
                 <a:solidFill>
                   <a:srgbClr val="F4F7FB"/>
                 </a:solidFill>
@@ -10787,7 +10790,7 @@
               </a:rPr>
               <a:t>Stamp the period on the export</a:t>
             </a:r>
-            <a:endParaRPr lang="en-US" sz="2100" dirty="0"/>
+            <a:endParaRPr lang="en-US" sz="1949" dirty="0"/>
           </a:p>
         </p:txBody>
       </p:sp>
@@ -10799,8 +10802,8 @@
         </p:nvSpPr>
         <p:spPr>
           <a:xfrm>
-            <a:off x="1115568" y="3814572"/>
-            <a:ext cx="4797400" cy="508000"/>
+            <a:off x="1115568" y="3457158"/>
+            <a:ext cx="4797400" cy="471369"/>
           </a:xfrm>
           <a:prstGeom prst="rect">
             <a:avLst/>
@@ -10819,7 +10822,7 @@
               <a:buNone/>
             </a:pPr>
             <a:r>
-              <a:rPr lang="en-US" sz="1600" dirty="0">
+              <a:rPr lang="en-US" sz="1485" dirty="0">
                 <a:solidFill>
                   <a:srgbClr val="91A0B7"/>
                 </a:solidFill>
@@ -10829,7 +10832,7 @@
               </a:rPr>
               <a:t>Every extract states the date range it covers, on the sheet.</a:t>
             </a:r>
-            <a:endParaRPr lang="en-US" sz="1600" dirty="0"/>
+            <a:endParaRPr lang="en-US" sz="1485" dirty="0"/>
           </a:p>
         </p:txBody>
       </p:sp>
@@ -10841,8 +10844,8 @@
         </p:nvSpPr>
         <p:spPr>
           <a:xfrm>
-            <a:off x="1115568" y="4368292"/>
-            <a:ext cx="4797400" cy="258826"/>
+            <a:off x="1115568" y="3974247"/>
+            <a:ext cx="4797400" cy="242800"/>
           </a:xfrm>
           <a:prstGeom prst="rect">
             <a:avLst/>
@@ -10861,7 +10864,7 @@
               <a:buNone/>
             </a:pPr>
             <a:r>
-              <a:rPr lang="en-US" sz="1400" i="1" dirty="0">
+              <a:rPr lang="en-US" sz="1299" i="1" dirty="0">
                 <a:solidFill>
                   <a:srgbClr val="3DD9EB"/>
                 </a:solidFill>
@@ -10871,7 +10874,7 @@
               </a:rPr>
               <a:t>Tip: Without it, no figure here can become a run-rate.</a:t>
             </a:r>
-            <a:endParaRPr lang="en-US" sz="1400" dirty="0"/>
+            <a:endParaRPr lang="en-US" sz="1299" dirty="0"/>
           </a:p>
         </p:txBody>
       </p:sp>
@@ -10948,7 +10951,7 @@
         <p:spPr>
           <a:xfrm>
             <a:off x="6937096" y="1463040"/>
-            <a:ext cx="4797400" cy="666750"/>
+            <a:ext cx="4797400" cy="309336"/>
           </a:xfrm>
           <a:prstGeom prst="rect">
             <a:avLst/>
@@ -10964,7 +10967,7 @@
               <a:buNone/>
             </a:pPr>
             <a:r>
-              <a:rPr lang="en-US" sz="2100" b="1" dirty="0">
+              <a:rPr lang="en-US" sz="1949" b="1" dirty="0">
                 <a:solidFill>
                   <a:srgbClr val="F4F7FB"/>
                 </a:solidFill>
@@ -10974,7 +10977,7 @@
               </a:rPr>
               <a:t>Fix the tag, not the spreadsheet</a:t>
             </a:r>
-            <a:endParaRPr lang="en-US" sz="2100" dirty="0"/>
+            <a:endParaRPr lang="en-US" sz="1949" dirty="0"/>
           </a:p>
         </p:txBody>
       </p:sp>
@@ -10986,8 +10989,8 @@
         </p:nvSpPr>
         <p:spPr>
           <a:xfrm>
-            <a:off x="6937096" y="2175510"/>
-            <a:ext cx="4797400" cy="508000"/>
+            <a:off x="6937096" y="1818096"/>
+            <a:ext cx="4797400" cy="471369"/>
           </a:xfrm>
           <a:prstGeom prst="rect">
             <a:avLst/>
@@ -11006,7 +11009,7 @@
               <a:buNone/>
             </a:pPr>
             <a:r>
-              <a:rPr lang="en-US" sz="1600" dirty="0">
+              <a:rPr lang="en-US" sz="1485" dirty="0">
                 <a:solidFill>
                   <a:srgbClr val="91A0B7"/>
                 </a:solidFill>
@@ -11016,7 +11019,7 @@
               </a:rPr>
               <a:t>Case-fold team names at source so a team cannot appear twice.</a:t>
             </a:r>
-            <a:endParaRPr lang="en-US" sz="1600" dirty="0"/>
+            <a:endParaRPr lang="en-US" sz="1485" dirty="0"/>
           </a:p>
         </p:txBody>
       </p:sp>
@@ -11028,8 +11031,8 @@
         </p:nvSpPr>
         <p:spPr>
           <a:xfrm>
-            <a:off x="6937096" y="2729230"/>
-            <a:ext cx="4797400" cy="258826"/>
+            <a:off x="6937096" y="2335185"/>
+            <a:ext cx="4797400" cy="242800"/>
           </a:xfrm>
           <a:prstGeom prst="rect">
             <a:avLst/>
@@ -11048,7 +11051,7 @@
               <a:buNone/>
             </a:pPr>
             <a:r>
-              <a:rPr lang="en-US" sz="1400" i="1" dirty="0">
+              <a:rPr lang="en-US" sz="1299" i="1" dirty="0">
                 <a:solidFill>
                   <a:srgbClr val="3DD9EB"/>
                 </a:solidFill>
@@ -11058,7 +11061,7 @@
               </a:rPr>
               <a:t>Tip: Same defect that made the team total 30% too high.</a:t>
             </a:r>
-            <a:endParaRPr lang="en-US" sz="1400" dirty="0"/>
+            <a:endParaRPr lang="en-US" sz="1299" dirty="0"/>
           </a:p>
         </p:txBody>
       </p:sp>
@@ -11135,7 +11138,7 @@
         <p:spPr>
           <a:xfrm>
             <a:off x="6937096" y="3102102"/>
-            <a:ext cx="4797400" cy="666750"/>
+            <a:ext cx="4797400" cy="309336"/>
           </a:xfrm>
           <a:prstGeom prst="rect">
             <a:avLst/>
@@ -11151,7 +11154,7 @@
               <a:buNone/>
             </a:pPr>
             <a:r>
-              <a:rPr lang="en-US" sz="2100" b="1" dirty="0">
+              <a:rPr lang="en-US" sz="1949" b="1" dirty="0">
                 <a:solidFill>
                   <a:srgbClr val="F4F7FB"/>
                 </a:solidFill>
@@ -11161,7 +11164,7 @@
               </a:rPr>
               <a:t>No unnamed applications</a:t>
             </a:r>
-            <a:endParaRPr lang="en-US" sz="2100" dirty="0"/>
+            <a:endParaRPr lang="en-US" sz="1949" dirty="0"/>
           </a:p>
         </p:txBody>
       </p:sp>
@@ -11173,8 +11176,8 @@
         </p:nvSpPr>
         <p:spPr>
           <a:xfrm>
-            <a:off x="6937096" y="3814572"/>
-            <a:ext cx="4797400" cy="508000"/>
+            <a:off x="6937096" y="3457158"/>
+            <a:ext cx="4797400" cy="471369"/>
           </a:xfrm>
           <a:prstGeom prst="rect">
             <a:avLst/>
@@ -11193,7 +11196,7 @@
               <a:buNone/>
             </a:pPr>
             <a:r>
-              <a:rPr lang="en-US" sz="1600" dirty="0">
+              <a:rPr lang="en-US" sz="1485" dirty="0">
                 <a:solidFill>
                   <a:srgbClr val="91A0B7"/>
                 </a:solidFill>
@@ -11203,7 +11206,7 @@
               </a:rPr>
               <a:t>An application without a name cannot be charged back to anyone.</a:t>
             </a:r>
-            <a:endParaRPr lang="en-US" sz="1600" dirty="0"/>
+            <a:endParaRPr lang="en-US" sz="1485" dirty="0"/>
           </a:p>
         </p:txBody>
       </p:sp>
@@ -11215,8 +11218,8 @@
         </p:nvSpPr>
         <p:spPr>
           <a:xfrm>
-            <a:off x="6937096" y="4368292"/>
-            <a:ext cx="4797400" cy="258826"/>
+            <a:off x="6937096" y="3974247"/>
+            <a:ext cx="4797400" cy="242800"/>
           </a:xfrm>
           <a:prstGeom prst="rect">
             <a:avLst/>
@@ -11235,7 +11238,7 @@
               <a:buNone/>
             </a:pPr>
             <a:r>
-              <a:rPr lang="en-US" sz="1400" i="1" dirty="0">
+              <a:rPr lang="en-US" sz="1299" i="1" dirty="0">
                 <a:solidFill>
                   <a:srgbClr val="3DD9EB"/>
                 </a:solidFill>
@@ -11245,7 +11248,7 @@
               </a:rPr>
               <a:t>Tip: $5,342 is sitting in unknown and unlabeled today.</a:t>
             </a:r>
-            <a:endParaRPr lang="en-US" sz="1400" dirty="0"/>
+            <a:endParaRPr lang="en-US" sz="1299" dirty="0"/>
           </a:p>
         </p:txBody>
       </p:sp>

--- a/deck/AI_Cost_by_Application.pptx
+++ b/deck/AI_Cost_by_Application.pptx
@@ -4146,7 +4146,7 @@
         </p:nvSpPr>
         <p:spPr>
           <a:xfrm>
-            <a:off x="457200" y="3295026"/>
+            <a:off x="457200" y="3293502"/>
             <a:ext cx="2834640" cy="292608"/>
           </a:xfrm>
           <a:prstGeom prst="rect">
@@ -4185,7 +4185,7 @@
         </p:nvSpPr>
         <p:spPr>
           <a:xfrm>
-            <a:off x="3474720" y="3368178"/>
+            <a:off x="3474720" y="3366654"/>
             <a:ext cx="7071055" cy="146304"/>
           </a:xfrm>
           <a:prstGeom prst="roundRect">
@@ -4212,7 +4212,7 @@
         </p:nvSpPr>
         <p:spPr>
           <a:xfrm>
-            <a:off x="3474720" y="3368178"/>
+            <a:off x="3474720" y="3366654"/>
             <a:ext cx="6615617" cy="146304"/>
           </a:xfrm>
           <a:prstGeom prst="roundRect">
@@ -4239,7 +4239,7 @@
         </p:nvSpPr>
         <p:spPr>
           <a:xfrm>
-            <a:off x="10682935" y="3295026"/>
+            <a:off x="10682935" y="3293502"/>
             <a:ext cx="1051560" cy="292608"/>
           </a:xfrm>
           <a:prstGeom prst="rect">
@@ -4278,7 +4278,7 @@
         </p:nvSpPr>
         <p:spPr>
           <a:xfrm>
-            <a:off x="457200" y="3636539"/>
+            <a:off x="457200" y="3633491"/>
             <a:ext cx="2834640" cy="292608"/>
           </a:xfrm>
           <a:prstGeom prst="rect">
@@ -4317,7 +4317,7 @@
         </p:nvSpPr>
         <p:spPr>
           <a:xfrm>
-            <a:off x="3474720" y="3709691"/>
+            <a:off x="3474720" y="3706643"/>
             <a:ext cx="7071055" cy="146304"/>
           </a:xfrm>
           <a:prstGeom prst="roundRect">
@@ -4344,7 +4344,7 @@
         </p:nvSpPr>
         <p:spPr>
           <a:xfrm>
-            <a:off x="3474720" y="3709691"/>
+            <a:off x="3474720" y="3706643"/>
             <a:ext cx="3290590" cy="146304"/>
           </a:xfrm>
           <a:prstGeom prst="roundRect">
@@ -4371,7 +4371,7 @@
         </p:nvSpPr>
         <p:spPr>
           <a:xfrm>
-            <a:off x="10682935" y="3636539"/>
+            <a:off x="10682935" y="3633491"/>
             <a:ext cx="1051560" cy="292608"/>
           </a:xfrm>
           <a:prstGeom prst="rect">
@@ -4410,7 +4410,7 @@
         </p:nvSpPr>
         <p:spPr>
           <a:xfrm>
-            <a:off x="457200" y="3978053"/>
+            <a:off x="457200" y="3973481"/>
             <a:ext cx="2834640" cy="292608"/>
           </a:xfrm>
           <a:prstGeom prst="rect">
@@ -4449,7 +4449,7 @@
         </p:nvSpPr>
         <p:spPr>
           <a:xfrm>
-            <a:off x="3474720" y="4051205"/>
+            <a:off x="3474720" y="4046633"/>
             <a:ext cx="7071055" cy="146304"/>
           </a:xfrm>
           <a:prstGeom prst="roundRect">
@@ -4476,7 +4476,7 @@
         </p:nvSpPr>
         <p:spPr>
           <a:xfrm>
-            <a:off x="3474720" y="4051205"/>
+            <a:off x="3474720" y="4046633"/>
             <a:ext cx="2578081" cy="146304"/>
           </a:xfrm>
           <a:prstGeom prst="roundRect">
@@ -4503,7 +4503,7 @@
         </p:nvSpPr>
         <p:spPr>
           <a:xfrm>
-            <a:off x="10682935" y="3978053"/>
+            <a:off x="10682935" y="3973481"/>
             <a:ext cx="1051560" cy="292608"/>
           </a:xfrm>
           <a:prstGeom prst="rect">
@@ -4542,7 +4542,7 @@
         </p:nvSpPr>
         <p:spPr>
           <a:xfrm>
-            <a:off x="457200" y="4319566"/>
+            <a:off x="457200" y="4313470"/>
             <a:ext cx="2834640" cy="292608"/>
           </a:xfrm>
           <a:prstGeom prst="rect">
@@ -4581,7 +4581,7 @@
         </p:nvSpPr>
         <p:spPr>
           <a:xfrm>
-            <a:off x="3474720" y="4392718"/>
+            <a:off x="3474720" y="4386622"/>
             <a:ext cx="7071055" cy="146304"/>
           </a:xfrm>
           <a:prstGeom prst="roundRect">
@@ -4608,7 +4608,7 @@
         </p:nvSpPr>
         <p:spPr>
           <a:xfrm>
-            <a:off x="3474720" y="4392718"/>
+            <a:off x="3474720" y="4386622"/>
             <a:ext cx="1676457" cy="146304"/>
           </a:xfrm>
           <a:prstGeom prst="roundRect">
@@ -4635,7 +4635,7 @@
         </p:nvSpPr>
         <p:spPr>
           <a:xfrm>
-            <a:off x="10682935" y="4319566"/>
+            <a:off x="10682935" y="4313470"/>
             <a:ext cx="1051560" cy="292608"/>
           </a:xfrm>
           <a:prstGeom prst="rect">
@@ -4674,7 +4674,7 @@
         </p:nvSpPr>
         <p:spPr>
           <a:xfrm>
-            <a:off x="457200" y="4661080"/>
+            <a:off x="457200" y="4653460"/>
             <a:ext cx="2834640" cy="292608"/>
           </a:xfrm>
           <a:prstGeom prst="rect">
@@ -4713,7 +4713,7 @@
         </p:nvSpPr>
         <p:spPr>
           <a:xfrm>
-            <a:off x="3474720" y="4734232"/>
+            <a:off x="3474720" y="4726612"/>
             <a:ext cx="7071055" cy="146304"/>
           </a:xfrm>
           <a:prstGeom prst="roundRect">
@@ -4740,7 +4740,7 @@
         </p:nvSpPr>
         <p:spPr>
           <a:xfrm>
-            <a:off x="3474720" y="4734232"/>
+            <a:off x="3474720" y="4726612"/>
             <a:ext cx="1462965" cy="146304"/>
           </a:xfrm>
           <a:prstGeom prst="roundRect">
@@ -4767,7 +4767,7 @@
         </p:nvSpPr>
         <p:spPr>
           <a:xfrm>
-            <a:off x="10682935" y="4661080"/>
+            <a:off x="10682935" y="4653460"/>
             <a:ext cx="1051560" cy="292608"/>
           </a:xfrm>
           <a:prstGeom prst="rect">
@@ -4806,7 +4806,7 @@
         </p:nvSpPr>
         <p:spPr>
           <a:xfrm>
-            <a:off x="457200" y="5185474"/>
+            <a:off x="457200" y="5176330"/>
             <a:ext cx="11277295" cy="1041591"/>
           </a:xfrm>
           <a:prstGeom prst="roundRect">
@@ -4833,7 +4833,7 @@
         </p:nvSpPr>
         <p:spPr>
           <a:xfrm>
-            <a:off x="685800" y="5295202"/>
+            <a:off x="685800" y="5286058"/>
             <a:ext cx="10820095" cy="292608"/>
           </a:xfrm>
           <a:prstGeom prst="rect">
@@ -4872,7 +4872,7 @@
         </p:nvSpPr>
         <p:spPr>
           <a:xfrm>
-            <a:off x="685800" y="5624386"/>
+            <a:off x="685800" y="5615242"/>
             <a:ext cx="10820095" cy="474663"/>
           </a:xfrm>
           <a:prstGeom prst="rect">

--- a/deck/AI_Cost_by_Application.pptx
+++ b/deck/AI_Cost_by_Application.pptx
@@ -2571,7 +2571,7 @@
         <p:spPr>
           <a:xfrm>
             <a:off x="8321040" y="493776"/>
-            <a:ext cx="3413455" cy="658368"/>
+            <a:ext cx="3413455" cy="731520"/>
           </a:xfrm>
           <a:prstGeom prst="rect">
             <a:avLst/>
@@ -3604,7 +3604,7 @@
         <p:spPr>
           <a:xfrm>
             <a:off x="8321040" y="493776"/>
-            <a:ext cx="3413455" cy="658368"/>
+            <a:ext cx="3413455" cy="731520"/>
           </a:xfrm>
           <a:prstGeom prst="rect">
             <a:avLst/>
@@ -5075,7 +5075,7 @@
         <p:spPr>
           <a:xfrm>
             <a:off x="8321040" y="493776"/>
-            <a:ext cx="3413455" cy="658368"/>
+            <a:ext cx="3413455" cy="731520"/>
           </a:xfrm>
           <a:prstGeom prst="rect">
             <a:avLst/>
@@ -5815,7 +5815,7 @@
         <p:spPr>
           <a:xfrm>
             <a:off x="8321040" y="493776"/>
-            <a:ext cx="3413455" cy="658368"/>
+            <a:ext cx="3413455" cy="731520"/>
           </a:xfrm>
           <a:prstGeom prst="rect">
             <a:avLst/>
@@ -6555,7 +6555,7 @@
         <p:spPr>
           <a:xfrm>
             <a:off x="8321040" y="493776"/>
-            <a:ext cx="3413455" cy="658368"/>
+            <a:ext cx="3413455" cy="731520"/>
           </a:xfrm>
           <a:prstGeom prst="rect">
             <a:avLst/>
@@ -8306,7 +8306,7 @@
         <p:spPr>
           <a:xfrm>
             <a:off x="8321040" y="493776"/>
-            <a:ext cx="3413455" cy="658368"/>
+            <a:ext cx="3413455" cy="731520"/>
           </a:xfrm>
           <a:prstGeom prst="rect">
             <a:avLst/>
@@ -10471,7 +10471,7 @@
         <p:spPr>
           <a:xfrm>
             <a:off x="8321040" y="493776"/>
-            <a:ext cx="3413455" cy="658368"/>
+            <a:ext cx="3413455" cy="731520"/>
           </a:xfrm>
           <a:prstGeom prst="rect">
             <a:avLst/>
@@ -11346,7 +11346,7 @@
               <a:buNone/>
             </a:pPr>
             <a:r>
-              <a:rPr lang="en-US" sz="1600" dirty="0">
+              <a:rPr lang="en-US" sz="1200" dirty="0">
                 <a:solidFill>
                   <a:srgbClr val="91A0B7"/>
                 </a:solidFill>
@@ -11356,7 +11356,7 @@
               </a:rPr>
               <a:t>With actuals on every provider and a stated period, the same export answers what we spent, who spent it, and whether the estimate is holding, every month, without anyone rebuilding the sheet.</a:t>
             </a:r>
-            <a:endParaRPr lang="en-US" sz="1600" dirty="0"/>
+            <a:endParaRPr lang="en-US" sz="1200" dirty="0"/>
           </a:p>
         </p:txBody>
       </p:sp>

--- a/deck/AI_Cost_by_Application.pptx
+++ b/deck/AI_Cost_by_Application.pptx
@@ -9869,7 +9869,7 @@
         </p:nvSpPr>
         <p:spPr>
           <a:xfrm>
-            <a:off x="457200" y="4477512"/>
+            <a:off x="457200" y="4156283"/>
             <a:ext cx="3606698" cy="1078992"/>
           </a:xfrm>
           <a:prstGeom prst="roundRect">
@@ -9896,7 +9896,7 @@
         </p:nvSpPr>
         <p:spPr>
           <a:xfrm>
-            <a:off x="658368" y="4568952"/>
+            <a:off x="658368" y="4247723"/>
             <a:ext cx="3204362" cy="237744"/>
           </a:xfrm>
           <a:prstGeom prst="rect">
@@ -9935,7 +9935,7 @@
         </p:nvSpPr>
         <p:spPr>
           <a:xfrm>
-            <a:off x="658368" y="4770120"/>
+            <a:off x="658368" y="4448891"/>
             <a:ext cx="3204362" cy="438912"/>
           </a:xfrm>
           <a:prstGeom prst="rect">
@@ -9974,7 +9974,7 @@
         </p:nvSpPr>
         <p:spPr>
           <a:xfrm>
-            <a:off x="658368" y="5172456"/>
+            <a:off x="658368" y="4851227"/>
             <a:ext cx="3204362" cy="338328"/>
           </a:xfrm>
           <a:prstGeom prst="rect">
@@ -10016,7 +10016,7 @@
         </p:nvSpPr>
         <p:spPr>
           <a:xfrm>
-            <a:off x="4292498" y="4477512"/>
+            <a:off x="4292498" y="4156283"/>
             <a:ext cx="3606698" cy="1078992"/>
           </a:xfrm>
           <a:prstGeom prst="roundRect">
@@ -10043,7 +10043,7 @@
         </p:nvSpPr>
         <p:spPr>
           <a:xfrm>
-            <a:off x="4493666" y="4568952"/>
+            <a:off x="4493666" y="4247723"/>
             <a:ext cx="3204362" cy="237744"/>
           </a:xfrm>
           <a:prstGeom prst="rect">
@@ -10082,7 +10082,7 @@
         </p:nvSpPr>
         <p:spPr>
           <a:xfrm>
-            <a:off x="4493666" y="4770120"/>
+            <a:off x="4493666" y="4448891"/>
             <a:ext cx="3204362" cy="438912"/>
           </a:xfrm>
           <a:prstGeom prst="rect">
@@ -10121,7 +10121,7 @@
         </p:nvSpPr>
         <p:spPr>
           <a:xfrm>
-            <a:off x="4493666" y="5172456"/>
+            <a:off x="4493666" y="4851227"/>
             <a:ext cx="3204362" cy="338328"/>
           </a:xfrm>
           <a:prstGeom prst="rect">
@@ -10163,7 +10163,7 @@
         </p:nvSpPr>
         <p:spPr>
           <a:xfrm>
-            <a:off x="8127797" y="4477512"/>
+            <a:off x="8127797" y="4156283"/>
             <a:ext cx="3606698" cy="1078992"/>
           </a:xfrm>
           <a:prstGeom prst="roundRect">
@@ -10190,7 +10190,7 @@
         </p:nvSpPr>
         <p:spPr>
           <a:xfrm>
-            <a:off x="8328965" y="4568952"/>
+            <a:off x="8328965" y="4247723"/>
             <a:ext cx="3204362" cy="237744"/>
           </a:xfrm>
           <a:prstGeom prst="rect">
@@ -10229,7 +10229,7 @@
         </p:nvSpPr>
         <p:spPr>
           <a:xfrm>
-            <a:off x="8328965" y="4770120"/>
+            <a:off x="8328965" y="4448891"/>
             <a:ext cx="3204362" cy="438912"/>
           </a:xfrm>
           <a:prstGeom prst="rect">
@@ -10268,7 +10268,7 @@
         </p:nvSpPr>
         <p:spPr>
           <a:xfrm>
-            <a:off x="8328965" y="5172456"/>
+            <a:off x="8328965" y="4851227"/>
             <a:ext cx="3204362" cy="338328"/>
           </a:xfrm>
           <a:prstGeom prst="rect">
